--- a/docs/presentations/REDTEAM_AGENTS_PRESENTATION.pptx
+++ b/docs/presentations/REDTEAM_AGENTS_PRESENTATION.pptx
@@ -3312,7 +3312,7 @@
               </a:defRPr>
             </a:pPr>
             <a:r>
-              <a:t>Presented by Agentic AI | April 2026</a:t>
+              <a:t>Presented by Agentic AI | September 2026</a:t>
             </a:r>
           </a:p>
         </p:txBody>
@@ -8335,7 +8335,7 @@
               </a:defRPr>
             </a:pPr>
             <a:r>
-              <a:t>🌐 https://agents.bedimsecurity.com</a:t>
+              <a:t>🌐 https://agents.example.com</a:t>
             </a:r>
           </a:p>
           <a:p>
